--- a/docs/content/introduction/introduction_lecture.pptx
+++ b/docs/content/introduction/introduction_lecture.pptx
@@ -3358,7 +3358,7 @@
             </a:pPr>
             <a:r>
               <a:rPr/>
-              <a:t>2026-09-04</a:t>
+              <a:t>2026-09-08</a:t>
             </a:r>
           </a:p>
         </p:txBody>

--- a/docs/content/introduction/introduction_lecture.pptx
+++ b/docs/content/introduction/introduction_lecture.pptx
@@ -3358,7 +3358,7 @@
             </a:pPr>
             <a:r>
               <a:rPr/>
-              <a:t>2026-09-08</a:t>
+              <a:t>2026-09-10</a:t>
             </a:r>
           </a:p>
         </p:txBody>

--- a/docs/content/introduction/introduction_lecture.pptx
+++ b/docs/content/introduction/introduction_lecture.pptx
@@ -3358,7 +3358,7 @@
             </a:pPr>
             <a:r>
               <a:rPr/>
-              <a:t>2026-09-10</a:t>
+              <a:t>2026-09-14</a:t>
             </a:r>
           </a:p>
         </p:txBody>

--- a/docs/content/introduction/introduction_lecture.pptx
+++ b/docs/content/introduction/introduction_lecture.pptx
@@ -3358,7 +3358,7 @@
             </a:pPr>
             <a:r>
               <a:rPr/>
-              <a:t>2026-09-14</a:t>
+              <a:t>2026-09-21</a:t>
             </a:r>
           </a:p>
         </p:txBody>

--- a/docs/content/introduction/introduction_lecture.pptx
+++ b/docs/content/introduction/introduction_lecture.pptx
@@ -3358,7 +3358,7 @@
             </a:pPr>
             <a:r>
               <a:rPr/>
-              <a:t>2026-09-21</a:t>
+              <a:t>2026-09-22</a:t>
             </a:r>
           </a:p>
         </p:txBody>

--- a/docs/content/introduction/introduction_lecture.pptx
+++ b/docs/content/introduction/introduction_lecture.pptx
@@ -3358,7 +3358,7 @@
             </a:pPr>
             <a:r>
               <a:rPr/>
-              <a:t>2026-09-22</a:t>
+              <a:t>2026-09-23</a:t>
             </a:r>
           </a:p>
         </p:txBody>

--- a/docs/content/introduction/introduction_lecture.pptx
+++ b/docs/content/introduction/introduction_lecture.pptx
@@ -3358,7 +3358,7 @@
             </a:pPr>
             <a:r>
               <a:rPr/>
-              <a:t>2026-09-23</a:t>
+              <a:t>2026-09-24</a:t>
             </a:r>
           </a:p>
         </p:txBody>

--- a/docs/content/introduction/introduction_lecture.pptx
+++ b/docs/content/introduction/introduction_lecture.pptx
@@ -3358,7 +3358,7 @@
             </a:pPr>
             <a:r>
               <a:rPr/>
-              <a:t>2026-09-24</a:t>
+              <a:t>2026-09-29</a:t>
             </a:r>
           </a:p>
         </p:txBody>

--- a/docs/content/introduction/introduction_lecture.pptx
+++ b/docs/content/introduction/introduction_lecture.pptx
@@ -3358,7 +3358,7 @@
             </a:pPr>
             <a:r>
               <a:rPr/>
-              <a:t>2026-09-29</a:t>
+              <a:t>2026-10-01</a:t>
             </a:r>
           </a:p>
         </p:txBody>

--- a/docs/content/introduction/introduction_lecture.pptx
+++ b/docs/content/introduction/introduction_lecture.pptx
@@ -3358,7 +3358,7 @@
             </a:pPr>
             <a:r>
               <a:rPr/>
-              <a:t>2026-10-01</a:t>
+              <a:t>2026-10-05</a:t>
             </a:r>
           </a:p>
         </p:txBody>

--- a/docs/content/introduction/introduction_lecture.pptx
+++ b/docs/content/introduction/introduction_lecture.pptx
@@ -3358,7 +3358,7 @@
             </a:pPr>
             <a:r>
               <a:rPr/>
-              <a:t>2026-10-05</a:t>
+              <a:t>2026-10-08</a:t>
             </a:r>
           </a:p>
         </p:txBody>

--- a/docs/content/introduction/introduction_lecture.pptx
+++ b/docs/content/introduction/introduction_lecture.pptx
@@ -3358,7 +3358,7 @@
             </a:pPr>
             <a:r>
               <a:rPr/>
-              <a:t>2026-10-08</a:t>
+              <a:t>2026-10-09</a:t>
             </a:r>
           </a:p>
         </p:txBody>

--- a/docs/content/introduction/introduction_lecture.pptx
+++ b/docs/content/introduction/introduction_lecture.pptx
@@ -3358,7 +3358,7 @@
             </a:pPr>
             <a:r>
               <a:rPr/>
-              <a:t>2026-10-09</a:t>
+              <a:t>2026-10-19</a:t>
             </a:r>
           </a:p>
         </p:txBody>

--- a/docs/content/introduction/introduction_lecture.pptx
+++ b/docs/content/introduction/introduction_lecture.pptx
@@ -3358,7 +3358,7 @@
             </a:pPr>
             <a:r>
               <a:rPr/>
-              <a:t>2026-10-19</a:t>
+              <a:t>2026-10-22</a:t>
             </a:r>
           </a:p>
         </p:txBody>
